--- a/decks/geog-economic-world/geog-economic-world_ch5_nigeria.pptx
+++ b/decks/geog-economic-world/geog-economic-world_ch5_nigeria.pptx
@@ -125,29 +125,29 @@
   <p:extLst>
     <p:ext uri="{521415D9-36F7-43E2-AB2F-B90AF26B5E84}">
       <p14:sectionLst xmlns:p14="http://schemas.microsoft.com/office/powerpoint/2010/main">
-        <p14:section name="Opening" id="{979e74ac-71fd-88ba-87b8-c79bf80d6d1c}">
+        <p14:section name="Opening" id="{ae51a785-cb3c-9741-001c-6d4c0ee30ea1}">
           <p14:sldIdLst>
             <p14:sldId id="256"/>
           </p14:sldIdLst>
         </p14:section>
-        <p14:section name="Gate" id="{296684de-5abd-069a-288d-e2a8422cb83a}">
+        <p14:section name="Gate" id="{a37699c3-0ec0-82bc-e80e-12bf13924815}">
           <p14:sldIdLst>
             <p14:sldId id="257"/>
             <p14:sldId id="258"/>
           </p14:sldIdLst>
         </p14:section>
-        <p14:section name="Pre-teach" id="{3ba05bbb-8153-a1fd-7c18-60f48857e5a3}">
+        <p14:section name="Pre-teach" id="{da17e97a-6f18-7345-9597-f8819799c23d}">
           <p14:sldIdLst>
             <p14:sldId id="259"/>
           </p14:sldIdLst>
         </p14:section>
-        <p14:section name="Read-along" id="{4f4b62ec-dace-8c63-7430-a9992b4a6eaa}">
+        <p14:section name="Read-along" id="{4f081654-24ec-35f7-633f-2cb262025355}">
           <p14:sldIdLst>
             <p14:sldId id="260"/>
             <p14:sldId id="261"/>
           </p14:sldIdLst>
         </p14:section>
-        <p14:section name="Teach" id="{d493cc5d-22c1-adb8-0176-08fb938404e8}">
+        <p14:section name="Teach" id="{2547eaf8-1034-d6eb-6cc1-2e03b1fb02ad}">
           <p14:sldIdLst>
             <p14:sldId id="262"/>
             <p14:sldId id="263"/>
@@ -156,7 +156,7 @@
             <p14:sldId id="266"/>
           </p14:sldIdLst>
         </p14:section>
-        <p14:section name="Routes" id="{395906ac-abfc-08e7-453d-d3dc4169c720}">
+        <p14:section name="Routes" id="{03045b34-361b-c066-6a8d-94940bc662bb}">
           <p14:sldIdLst>
             <p14:sldId id="267"/>
             <p14:sldId id="268"/>
@@ -164,12 +164,12 @@
             <p14:sldId id="270"/>
           </p14:sldIdLst>
         </p14:section>
-        <p14:section name="Close" id="{c4cca929-8850-9c7e-26c5-015dd00a61aa}">
+        <p14:section name="Close" id="{79f16d71-15b9-2d2d-cdcd-7bff4a980959}">
           <p14:sldIdLst>
             <p14:sldId id="271"/>
           </p14:sldIdLst>
         </p14:section>
-        <p14:section name="Answers" id="{f3ab1d9c-c2ca-b338-5245-87575cd9944f}">
+        <p14:section name="Answers" id="{ed56ffab-987e-4987-de57-f736e5356d8d}">
           <p14:sldIdLst>
             <p14:sldId id="272"/>
             <p14:sldId id="273"/>
@@ -673,7 +673,7 @@
               <a:rPr lang="en-US" dirty="0"/>
               <a:t>Teach — Oil, trade and the transnational corporations. Say it in your own words, then check understanding with a quick question: ask a pupil from the pre-teach group first, since they met these words and ideas before the lesson. Pupils try to recall before you re-explain.
 Nigeria has 37.2 billion barrels of oil reserves, the tenth largest reserves of crude oil in the world, and is responsible for 2.9% of global oil production. Oil dominates what it sells. In 2015 mineral fuels including oil earned 50.8 billion US dollars, which was 94.5% of all Nigeria's exports; cocoa came second at 1%, then wood and oil seeds. What it buys is much more varied: in 2014 its biggest imports were oil at 15.3% of the total, then machines, engines and pumps at 12.6%, electronic equipment at 9.3% and vehicles at 8.4%. Buying oil while selling oil looks strange until you realise that Nigeria exports crude and has to import refined fuel. Nigeria's political and trading links have grown since independence: it belongs to the African Union, an organisation of 54 countries that plans economically and keeps the peace; to ECOWAS, the trading group of west African states, whose headquarters are in Abuja; to CEN-SAD, a trading group of states bordering the Sahara that also builds sporting links; to the United Nations, where it is a major contributor of peacekeeping troops; to OPEC, which aims to stabilise oil prices and keep supply regular; and to the Commonwealth, a voluntary association of 53 states, most of them former British colonies.
-A transnational corporation is a company with operations, such as factories, offices, research and shops, in more than one country. Shell is the one to know in Nigeria. Its oil fields are mainly in the Niger Delta in the south, much of the drilling is offshore in deep water, and the oil has to be brought ashore by pipeline. The benefits to Nigeria are large: Shell contributes to taxes and export revenue, provides employment for 65 000 workers in the oil industry and 250 000 in related industries, has given 91% of its contracts to Nigerian companies, and has encouraged the growth of the whole Nigerian energy sector. Unilever is the other example: TNCs such as Unilever promote improvements in healthcare and water supply that benefit local communities as well as the company, offer consumers more choice and sometimes lower prices, and provide accommodation, education facilities and better conditions of employment for their workers.
+A transnational corporation is a company with operations, such as factories, offices, research and shops, in more than one country. Shell is the one to know in Nigeria. Its oil fields are mainly in the Niger Delta in the south, much of the drilling is offshore in deep water, and the oil has to be brought ashore by pipeline. The benefits to Nigeria are large: Shell contributes to taxes and export revenue, employs 65 000 people in oil itself and a further 250 000 in related industries, has given 91% of its contracts to Nigerian companies, and has encouraged the growth of the whole Nigerian energy sector. Unilever is the other example: TNCs such as Unilever promote improvements in healthcare and water supply that benefit local communities as well as the company, offer consumers more choice and sometimes lower prices, and provide accommodation, education facilities and better conditions of employment for their workers.
 The costs are just as real. Pay may be low and working conditions poor, with little regard for health and safety or for the environment; management may not be Nigerian; much of the profit goes overseas, which geographers call leakage; oil spills cause water pollution and soil degradation, which disrupts agriculture and fishing; toxic fumes from flaring cause air pollution; installations are liable to attack from militant groups; and oil theft and sabotage cost both the government and the companies. One detail explains why Nigerian crude is in demand: it is known as sweet oil because its sulphur content is very low, which makes it higher quality than oil from the Middle East and cheaper to refine into petrol. Sour crude has to have its impurities stripped out first, which raises the cost of processing and the price of the fuel made from it. Higher demand for sweet oil means a better price, which is why crude is Nigeria's largest export earner and a direct contributor to its growth.
 Worked example — model it step by step, thinking aloud: Shell employs 65 000 people in Nigeria's oil industry and 250 000 in industries related to it. How many jobs is that in total, and what fraction of them are in the oil industry itself? (1) Add the two figures: 65 000 + 250 000. (2) That gives 315 000 jobs altogether. (3) For the fraction, put the oil-industry figure over the total: 65 000 ÷ 315 000. (4) That is about 0.21, so roughly a fifth of the jobs are in oil itself and the rest are in related industries. Answer: 315 000 jobs in total, of which about a fifth are in the oil industry itself.
 Tip: The multiplier effect is the reason the related-industry figure matters. Quote both numbers and then say that the 250 000 jobs exist because the 65 000 exist.</a:t>
@@ -766,7 +766,7 @@
               <a:rPr lang="en-US" dirty="0"/>
               <a:t>Teach — Aid, the environment and quality of life. Say it in your own words, then check understanding with a quick question: ask a pupil from the pre-teach group first, since they met these words and ideas before the lesson. Pupils try to recall before you re-explain.
 Nigeria receives both emergency aid, which is short-term help in the form of food, water, medical supplies and shelter, and developmental aid, which is long-term support from charities, governments and multilateral organisations aimed at improving quality of life. Its three main donors together give roughly 375 million US dollars, one of them a global vaccine fund. Aid has achieved real things: malaria deaths have been cut by providing nets and teaching people about the disease, the spread of HIV has been slowed by education and healthcare, orphans have been looked after so that children have better futures, and long-term loans to businesses outside oil have begun to reduce the country's dependence on it. Aid given to governments may not help development, because there may be corruption so that people take the money, the government may spend it on things that do not help development, or the donor may say how the aid must be used in ways that suit the donor more than Nigeria. Small-scale projects work better: they need little money, no high technical skill and no expensive maintenance, they reach remote areas, they target aid where it is needed, and experts from non-governmental organisations work with local communities to identify what those communities actually want. United Kingdom aid to Nigeria has gone to security against Boko Haram, to moving energy and water supply out of state control, to education and communication technology for teachers and students, to training and funding for young people starting businesses, to greater gender equality and girls' secondary education in Muslim areas, and to a football partnership that develops young Nigerians' skills.
-Rapid growth has damaged the environment. Many illegal small-scale industries have grown up with no pollution control: chemical waste is dumped and pollutes water, and factory chimneys pollute the air. Large areas of forest have been cleared, and dams and irrigation schemes have made desertification worse. Rubbish, mainly plastic packaging and old electrical goods, piles up because there are no formal waste disposal or recycling facilities, polluting water supplies and letting rats spread disease. Oil spills destroy ecosystems and pollute water supplies, and burning oil releases carbon dioxide and causes acid rain. Gas flaring sends toxic fumes into the air and has covered the city of Port Harcourt, the centre of exploration in the Niger Delta, in soot. Two spills are named in the course. The Bonga spill, on 20 December 2011, released 1.68 million gallons and created a slick 185 km long off the coast, the worst in the area for a decade, affecting 350 communities in the Niger Delta; in May 2016 the Nigerian government began legal action against Shell seeking compensation for the fishermen and communities affected. At Bodo, heavy leakage from a pipeline continued for six months, and because nearly 80% of local people are fishermen they had to leave to find new fishing grounds; in 2015 compensation of £35 million went to individuals and £20 million to the community, with £2100 for each individual, and Shell agreed to clean up the area.
+Rapid growth has damaged the environment. Many illegal small-scale industries have grown up with no pollution control: chemical waste is dumped and pollutes water, and factory chimneys pollute the air. Large areas of forest have been cleared, and dams and irrigation schemes have made desertification worse. Rubbish, mainly plastic packaging and old electrical goods, piles up because there are no formal waste disposal or recycling facilities, polluting water supplies and letting rats spread disease. Oil spills destroy ecosystems and pollute water supplies, and burning oil releases carbon dioxide and causes acid rain. Gas flaring sends toxic fumes into the air and has covered the city of Port Harcourt, the centre of exploration in the Niger Delta, in soot. Two spills are named in the course. The Bonga spill, on 20 December 2011, released 1.68 million gallons and created a slick 185 km long off the coast, the worst in the area for ten years, and 350 communities in the Niger Delta were affected; legal action by the Nigerian government began in May 2016 against Shell seeking compensation for the fishermen and communities affected. At Bodo, heavy leakage from a pipeline continued for six months, and because nearly 80% of local people are fishermen they had to leave to find new fishing grounds; in 2015 compensation of £35 million went to individuals and £20 million to the community, with £2100 for each individual, and Shell agreed to clean up the area.
 Spills can be prevented. Infrastructure should be maintained so that pipelines do not leak, pipelines should be protected against sabotage and other criminal behaviour, oil exploration should be prohibited in sensitive areas where a fragile ecosystem could be destroyed, and there should be strict pollution regulation with heavy fines for companies that do not take every necessary precaution. Meanwhile quality of life has improved for many Nigerians through the multiplier effect: taxes from oil and from TNCs have paid for hospitals, schools, roads and energy, which creates more jobs again; healthier people can be educated; better-educated women have smaller families and lower rates of HIV; life expectancy and GDP have risen. But the gains are very unequal. Measured as GDP per person, the south of the country stands at about 8343 US dollars and the north at about 292. The north has a harsher climate, areas far from the coast and lower rates of school enrolment, and the number of girls entering secondary school there remains low. The population is still growing faster than the economy is developing, so many people are missing out on the benefits altogether.
 Tip: For the nine-mark quality-of-life question, give one paragraph of improvements with figures, one paragraph of problems with figures, and then judge. A judgement with no figures cannot reach the top level.</a:t>
             </a:r>
@@ -2258,7 +2258,7 @@
               <a:rPr lang="en-US" dirty="0"/>
               <a:t>Teach — Oil, trade and the transnational corporations. Say it in your own words, then check understanding with a quick question: ask a pupil from the pre-teach group first, since they met these words and ideas before the lesson. Pupils try to recall before you re-explain.
 Nigeria has 37.2 billion barrels of oil reserves, the tenth largest reserves of crude oil in the world, and is responsible for 2.9% of global oil production. Oil dominates what it sells. In 2015 mineral fuels including oil earned 50.8 billion US dollars, which was 94.5% of all Nigeria's exports; cocoa came second at 1%, then wood and oil seeds. What it buys is much more varied: in 2014 its biggest imports were oil at 15.3% of the total, then machines, engines and pumps at 12.6%, electronic equipment at 9.3% and vehicles at 8.4%. Buying oil while selling oil looks strange until you realise that Nigeria exports crude and has to import refined fuel. Nigeria's political and trading links have grown since independence: it belongs to the African Union, an organisation of 54 countries that plans economically and keeps the peace; to ECOWAS, the trading group of west African states, whose headquarters are in Abuja; to CEN-SAD, a trading group of states bordering the Sahara that also builds sporting links; to the United Nations, where it is a major contributor of peacekeeping troops; to OPEC, which aims to stabilise oil prices and keep supply regular; and to the Commonwealth, a voluntary association of 53 states, most of them former British colonies.
-A transnational corporation is a company with operations, such as factories, offices, research and shops, in more than one country. Shell is the one to know in Nigeria. Its oil fields are mainly in the Niger Delta in the south, much of the drilling is offshore in deep water, and the oil has to be brought ashore by pipeline. The benefits to Nigeria are large: Shell contributes to taxes and export revenue, provides employment for 65 000 workers in the oil industry and 250 000 in related industries, has given 91% of its contracts to Nigerian companies, and has encouraged the growth of the whole Nigerian energy sector. Unilever is the other example: TNCs such as Unilever promote improvements in healthcare and water supply that benefit local communities as well as the company, offer consumers more choice and sometimes lower prices, and provide accommodation, education facilities and better conditions of employment for their workers.
+A transnational corporation is a company with operations, such as factories, offices, research and shops, in more than one country. Shell is the one to know in Nigeria. Its oil fields are mainly in the Niger Delta in the south, much of the drilling is offshore in deep water, and the oil has to be brought ashore by pipeline. The benefits to Nigeria are large: Shell contributes to taxes and export revenue, employs 65 000 people in oil itself and a further 250 000 in related industries, has given 91% of its contracts to Nigerian companies, and has encouraged the growth of the whole Nigerian energy sector. Unilever is the other example: TNCs such as Unilever promote improvements in healthcare and water supply that benefit local communities as well as the company, offer consumers more choice and sometimes lower prices, and provide accommodation, education facilities and better conditions of employment for their workers.
 The costs are just as real. Pay may be low and working conditions poor, with little regard for health and safety or for the environment; management may not be Nigerian; much of the profit goes overseas, which geographers call leakage; oil spills cause water pollution and soil degradation, which disrupts agriculture and fishing; toxic fumes from flaring cause air pollution; installations are liable to attack from militant groups; and oil theft and sabotage cost both the government and the companies. One detail explains why Nigerian crude is in demand: it is known as sweet oil because its sulphur content is very low, which makes it higher quality than oil from the Middle East and cheaper to refine into petrol. Sour crude has to have its impurities stripped out first, which raises the cost of processing and the price of the fuel made from it. Higher demand for sweet oil means a better price, which is why crude is Nigeria's largest export earner and a direct contributor to its growth.
 Worked example — model it step by step, thinking aloud: Shell employs 65 000 people in Nigeria's oil industry and 250 000 in industries related to it. How many jobs is that in total, and what fraction of them are in the oil industry itself? (1) Add the two figures: 65 000 + 250 000. (2) That gives 315 000 jobs altogether. (3) For the fraction, put the oil-industry figure over the total: 65 000 ÷ 315 000. (4) That is about 0.21, so roughly a fifth of the jobs are in oil itself and the rest are in related industries. Answer: 315 000 jobs in total, of which about a fifth are in the oil industry itself.
 Tip: The multiplier effect is the reason the related-industry figure matters. Quote both numbers and then say that the 250 000 jobs exist because the 65 000 exist.</a:t>
